--- a/m2/diapositivos/sessao-07-m2-f09.pptx
+++ b/m2/diapositivos/sessao-07-m2-f09.pptx
@@ -2601,7 +2601,87 @@
                 <a:ea typeface="Georgia" pitchFamily="34" charset="-122"/>
                 <a:cs typeface="Georgia" pitchFamily="34" charset="-120"/>
               </a:rPr>
-              <a:t>Em grupo, recontem a Farsa de Inês Pereira num vídeo de 3 a 5 minutos, passado hoje. Conservem a estrutura (dois pretendentes, escolha, castigo, segunda escolha) e o provérbio. Mudem o resto. Na apresentação oral de 5 minutos, expliquem as vossas escolhas e a fidelidade à farsa.</a:t>
+              <a:t>Em grupo, recontem a </a:t>
+            </a:r>
+            <a:pPr indent="0" marL="0">
+              <a:lnSpc>
+                <a:spcPct val="120000"/>
+              </a:lnSpc>
+              <a:spcAft>
+                <a:spcPts val="1000"/>
+              </a:spcAft>
+              <a:buNone/>
+            </a:pPr>
+            <a:r>
+              <a:rPr lang="en-US" sz="2300" i="1" dirty="0">
+                <a:solidFill>
+                  <a:srgbClr val="F2F0EA"/>
+                </a:solidFill>
+                <a:latin typeface="Georgia" pitchFamily="34" charset="0"/>
+                <a:ea typeface="Georgia" pitchFamily="34" charset="-122"/>
+                <a:cs typeface="Georgia" pitchFamily="34" charset="-120"/>
+              </a:rPr>
+              <a:t>Farsa de Inês Pereira</a:t>
+            </a:r>
+            <a:pPr indent="0" marL="0">
+              <a:lnSpc>
+                <a:spcPct val="120000"/>
+              </a:lnSpc>
+              <a:spcAft>
+                <a:spcPts val="1000"/>
+              </a:spcAft>
+              <a:buNone/>
+            </a:pPr>
+            <a:r>
+              <a:rPr lang="en-US" sz="2300" dirty="0">
+                <a:solidFill>
+                  <a:srgbClr val="F2F0EA"/>
+                </a:solidFill>
+                <a:latin typeface="Georgia" pitchFamily="34" charset="0"/>
+                <a:ea typeface="Georgia" pitchFamily="34" charset="-122"/>
+                <a:cs typeface="Georgia" pitchFamily="34" charset="-120"/>
+              </a:rPr>
+              <a:t> num vídeo de </a:t>
+            </a:r>
+            <a:pPr indent="0" marL="0">
+              <a:lnSpc>
+                <a:spcPct val="120000"/>
+              </a:lnSpc>
+              <a:spcAft>
+                <a:spcPts val="1000"/>
+              </a:spcAft>
+              <a:buNone/>
+            </a:pPr>
+            <a:r>
+              <a:rPr lang="en-US" sz="2300" b="1" dirty="0">
+                <a:solidFill>
+                  <a:srgbClr val="F2F0EA"/>
+                </a:solidFill>
+                <a:latin typeface="Georgia" pitchFamily="34" charset="0"/>
+                <a:ea typeface="Georgia" pitchFamily="34" charset="-122"/>
+                <a:cs typeface="Georgia" pitchFamily="34" charset="-120"/>
+              </a:rPr>
+              <a:t>3 a 5 minutos</a:t>
+            </a:r>
+            <a:pPr indent="0" marL="0">
+              <a:lnSpc>
+                <a:spcPct val="120000"/>
+              </a:lnSpc>
+              <a:spcAft>
+                <a:spcPts val="1000"/>
+              </a:spcAft>
+              <a:buNone/>
+            </a:pPr>
+            <a:r>
+              <a:rPr lang="en-US" sz="2300" dirty="0">
+                <a:solidFill>
+                  <a:srgbClr val="F2F0EA"/>
+                </a:solidFill>
+                <a:latin typeface="Georgia" pitchFamily="34" charset="0"/>
+                <a:ea typeface="Georgia" pitchFamily="34" charset="-122"/>
+                <a:cs typeface="Georgia" pitchFamily="34" charset="-120"/>
+              </a:rPr>
+              <a:t>, passado hoje. Conservem a estrutura (dois pretendentes, escolha, castigo, segunda escolha) e o provérbio. Mudem o resto. Na apresentação oral de 5 minutos, expliquem as vossas escolhas e a fidelidade à farsa.</a:t>
             </a:r>
             <a:endParaRPr lang="en-US" sz="2300" dirty="0"/>
           </a:p>
